--- a/AICTE_M6_Presentation_Detailed.pptx
+++ b/AICTE_M6_Presentation_Detailed.pptx
@@ -3150,12 +3150,12 @@
               </a:defRPr>
             </a:pPr>
             <a:r>
-              <a:t>Module M6: Audit + Attendance + Reports + Institutional Memory</a:t>
+              <a:t>Complete Overhaul &amp; Integrated Multi-Module Security Suite</a:t>
             </a:r>
             <a:br/>
             <a:br/>
             <a:r>
-              <a:t>Detailed Technical Architectures, Database Dictionary, and API Structures</a:t>
+              <a:t>Walkthrough Deck: Light/Dark Mode, MFA, Jitsi WebRTC, S3 Files, Blockchain, &amp; AI MoMs</a:t>
             </a:r>
             <a:br/>
             <a:r>
@@ -3221,7 +3221,7 @@
               </a:defRPr>
             </a:pPr>
             <a:r>
-              <a:t>M6 Prototype Stack &amp; Deliverables</a:t>
+              <a:t>Widescreen Prototype Architecture</a:t>
             </a:r>
           </a:p>
         </p:txBody>
@@ -3260,7 +3260,7 @@
               </a:defRPr>
             </a:pPr>
             <a:r>
-              <a:t>Frontend &amp; Design (Tailwind v4)</a:t>
+              <a:t>Front-End UI Deliverables</a:t>
             </a:r>
           </a:p>
           <a:p>
@@ -3268,7 +3268,7 @@
               <a:lnSpc>
                 <a:spcPct val="120000"/>
               </a:lnSpc>
-              <a:defRPr sz="1500">
+              <a:defRPr sz="1400">
                 <a:solidFill>
                   <a:srgbClr val="94A3B8"/>
                 </a:solidFill>
@@ -3276,7 +3276,7 @@
               </a:defRPr>
             </a:pPr>
             <a:r>
-              <a:t>React + Vite frontend dev stack. Uses a premium dark-navy theme (#0A0F1D), glassmorphism styles, Recharts analytics, and Lucide icons.</a:t>
+              <a:t>React + Vite widescreen framework. Widescreen widescreen layout (16:9 widescreen layout), Tailwind CSS v4 design system, and Lucide vector icons.</a:t>
             </a:r>
           </a:p>
         </p:txBody>
@@ -3315,7 +3315,7 @@
               </a:defRPr>
             </a:pPr>
             <a:r>
-              <a:t>Backend &amp; Presentation Guides</a:t>
+              <a:t>Mock Server API &amp; Databases</a:t>
             </a:r>
           </a:p>
           <a:p>
@@ -3323,7 +3323,7 @@
               <a:lnSpc>
                 <a:spcPct val="120000"/>
               </a:lnSpc>
-              <a:defRPr sz="1500">
+              <a:defRPr sz="1400">
                 <a:solidFill>
                   <a:srgbClr val="94A3B8"/>
                 </a:solidFill>
@@ -3331,7 +3331,7 @@
               </a:defRPr>
             </a:pPr>
             <a:r>
-              <a:t>Express API server with mock databases. Features a floating Demo Controller walkthrough bar to guide evaluators through M6 specifications.</a:t>
+              <a:t>Express API server with mock databases. Client-side state fallback coordinates operations offline. Linked GitHub codebase and live Vercel cloud deploy.</a:t>
             </a:r>
           </a:p>
         </p:txBody>
@@ -3429,7 +3429,7 @@
               </a:defRPr>
             </a:pPr>
             <a:r>
-              <a:t>Module M6 Scope &amp; Platform Role</a:t>
+              <a:t>Topic: Global UI/UX Design &amp; Theme System</a:t>
             </a:r>
           </a:p>
         </p:txBody>
@@ -3468,7 +3468,7 @@
               </a:defRPr>
             </a:pPr>
             <a:r>
-              <a:t>Centralized Auditing &amp; Governance Cell</a:t>
+              <a:t>Light &amp; Dark Mode Integration</a:t>
             </a:r>
           </a:p>
           <a:p>
@@ -3476,7 +3476,7 @@
               <a:lnSpc>
                 <a:spcPct val="120000"/>
               </a:lnSpc>
-              <a:defRPr sz="1500">
+              <a:defRPr sz="1400">
                 <a:solidFill>
                   <a:srgbClr val="94A3B8"/>
                 </a:solidFill>
@@ -3484,7 +3484,19 @@
               </a:defRPr>
             </a:pPr>
             <a:r>
-              <a:t>M6 tracks, parses, and acts as the central logs ledger for all governance operations (M1 Auth, M2 Meetings, M3 Files, M4 Blockchain, M5 AI Transcripts).</a:t>
+              <a:t>• Responsive CSS Variables: Configured in index.css with mapped root custom properties.</a:t>
+            </a:r>
+            <a:br/>
+            <a:r>
+              <a:t>• LocalStorage Persistence: User theme selections remain consistent on page reloads.</a:t>
+            </a:r>
+            <a:br/>
+            <a:r>
+              <a:t>• System Preference Checks: Respects browser media queries on first visit.</a:t>
+            </a:r>
+            <a:br/>
+            <a:r>
+              <a:t>• Theme Toggler: Polished rotating Sun/Moon button animation in the primary header.</a:t>
             </a:r>
           </a:p>
         </p:txBody>
@@ -3523,7 +3535,7 @@
               </a:defRPr>
             </a:pPr>
             <a:r>
-              <a:t>Core System Capabilities</a:t>
+              <a:t>Premium Aesthetics</a:t>
             </a:r>
           </a:p>
           <a:p>
@@ -3531,7 +3543,7 @@
               <a:lnSpc>
                 <a:spcPct val="120000"/>
               </a:lnSpc>
-              <a:defRPr sz="1500">
+              <a:defRPr sz="1400">
                 <a:solidFill>
                   <a:srgbClr val="94A3B8"/>
                 </a:solidFill>
@@ -3539,23 +3551,15 @@
               </a:defRPr>
             </a:pPr>
             <a:r>
-              <a:t>• Compliance Auditing: Ingests logins, permission modifications, and file queries.</a:t>
+              <a:t>• Colors: Deep dark navy background (#0A0F1D) in dark mode, white/slate slate (#F8FAFC) in light mode.</a:t>
             </a:r>
             <a:br/>
             <a:r>
-              <a:t>• Attendance Analytics: Computes arrival, exit, and connection durations via webhooks.</a:t>
+              <a:t>• Glassmorphism: Cards feature glass-filtered backdrops with subtle border details.</a:t>
             </a:r>
             <a:br/>
             <a:r>
-              <a:t>• Reports Compiler: Parametric config engine committing report hashes to blockchain.</a:t>
-            </a:r>
-            <a:br/>
-            <a:r>
-              <a:t>• SOC Threat Center: Monitors credential logs and quarantines malicious IP addresses.</a:t>
-            </a:r>
-            <a:br/>
-            <a:r>
-              <a:t>• Memory Query: Role-based historic searches powered by PostgreSQL GIN indexes.</a:t>
+              <a:t>• Micro-Animations: Modal fade-ins, card scaling, and warning pulse glow states.</a:t>
             </a:r>
           </a:p>
         </p:txBody>
@@ -3653,7 +3657,7 @@
               </a:defRPr>
             </a:pPr>
             <a:r>
-              <a:t>Data Ingestion &amp; Integration Model</a:t>
+              <a:t>Module 1: Authentication &amp; MFA Gate</a:t>
             </a:r>
           </a:p>
         </p:txBody>
@@ -3692,7 +3696,7 @@
               </a:defRPr>
             </a:pPr>
             <a:r>
-              <a:t>Inbound Integrations (M1, M2, M3, M5)</a:t>
+              <a:t>Multi-Factor Authentication Flow</a:t>
             </a:r>
           </a:p>
           <a:p>
@@ -3700,7 +3704,7 @@
               <a:lnSpc>
                 <a:spcPct val="120000"/>
               </a:lnSpc>
-              <a:defRPr sz="1500">
+              <a:defRPr sz="1400">
                 <a:solidFill>
                   <a:srgbClr val="94A3B8"/>
                 </a:solidFill>
@@ -3708,19 +3712,15 @@
               </a:defRPr>
             </a:pPr>
             <a:r>
-              <a:t>• Module M1 (Auth): Transmits user login metadata, client IPs, and active session roles.</a:t>
+              <a:t>• Username/Password Validation: Primary login credentials check (admin_aicte / password123).</a:t>
             </a:r>
             <a:br/>
             <a:r>
-              <a:t>• Module M2 (Meetings): Jitsi webhook integration pushes join/leave connection signals.</a:t>
+              <a:t>• Passcode Toggle: Toggles visibility of the secure password access key.</a:t>
             </a:r>
             <a:br/>
             <a:r>
-              <a:t>• Module M3 (Files): Ingests audits on document downloads and access updates.</a:t>
-            </a:r>
-            <a:br/>
-            <a:r>
-              <a:t>• Module M5 (AI): Automatically maps summarized transcripts to memory indices.</a:t>
+              <a:t>• OTP Dialog: Displays 6-digit dynamic authenticator (TOTP) passcode prompt.</a:t>
             </a:r>
           </a:p>
         </p:txBody>
@@ -3759,7 +3759,7 @@
               </a:defRPr>
             </a:pPr>
             <a:r>
-              <a:t>Outbound &amp; Verification Hooks (M4)</a:t>
+              <a:t>Session Security Control</a:t>
             </a:r>
           </a:p>
           <a:p>
@@ -3767,7 +3767,7 @@
               <a:lnSpc>
                 <a:spcPct val="120000"/>
               </a:lnSpc>
-              <a:defRPr sz="1500">
+              <a:defRPr sz="1400">
                 <a:solidFill>
                   <a:srgbClr val="94A3B8"/>
                 </a:solidFill>
@@ -3775,7 +3775,11 @@
               </a:defRPr>
             </a:pPr>
             <a:r>
-              <a:t>• Module M4 (Ledger): Commits SHA-256 report integrity checksum hashes directly to private blockchain blocks, retrieving verification seals (hashes) to ensure document tamper-resistance.</a:t>
+              <a:t>• Access Token Sign-out: Dropdown in header terminates sessions and clears memory states.</a:t>
+            </a:r>
+            <a:br/>
+            <a:r>
+              <a:t>• RBAC Access: Displays officer credential badges based on role-based access control.</a:t>
             </a:r>
           </a:p>
         </p:txBody>
@@ -3873,7 +3877,7 @@
               </a:defRPr>
             </a:pPr>
             <a:r>
-              <a:t>Database Schema Design &amp; Indexes</a:t>
+              <a:t>Module 2: Council Meetings &amp; Jitsi Meet</a:t>
             </a:r>
           </a:p>
         </p:txBody>
@@ -3912,7 +3916,7 @@
               </a:defRPr>
             </a:pPr>
             <a:r>
-              <a:t>Relational Tables Structure (PostgreSQL)</a:t>
+              <a:t>WebRTC Video Conferencing</a:t>
             </a:r>
           </a:p>
           <a:p>
@@ -3920,7 +3924,7 @@
               <a:lnSpc>
                 <a:spcPct val="120000"/>
               </a:lnSpc>
-              <a:defRPr sz="1500">
+              <a:defRPr sz="1400">
                 <a:solidFill>
                   <a:srgbClr val="94A3B8"/>
                 </a:solidFill>
@@ -3928,19 +3932,11 @@
               </a:defRPr>
             </a:pPr>
             <a:r>
-              <a:t>• audit_logs: Stores actor_username, action description, module source, client IP, and severity.</a:t>
+              <a:t>• Jitsi External API: Dynamically fetches external_api.js script to mount active conference iframes.</a:t>
             </a:r>
             <a:br/>
             <a:r>
-              <a:t>• attendance: Stores join/leave times, computed active durations, and status badges.</a:t>
-            </a:r>
-            <a:br/>
-            <a:r>
-              <a:t>• compliance_reports: Houses metadata parameters and blockchain transaction hashes.</a:t>
-            </a:r>
-            <a:br/>
-            <a:r>
-              <a:t>• notifications: Manages priority-based alarms (LOW, MEDIUM, HIGH, CRITICAL).</a:t>
+              <a:t>• Audio/Video Hardware Toggle: Custom controls in room control bar interface.</a:t>
             </a:r>
           </a:p>
         </p:txBody>
@@ -3979,7 +3975,7 @@
               </a:defRPr>
             </a:pPr>
             <a:r>
-              <a:t>Optimization &amp; Search Indexing Triggers</a:t>
+              <a:t>Governance Scheduling</a:t>
             </a:r>
           </a:p>
           <a:p>
@@ -3987,7 +3983,7 @@
               <a:lnSpc>
                 <a:spcPct val="120000"/>
               </a:lnSpc>
-              <a:defRPr sz="1500">
+              <a:defRPr sz="1400">
                 <a:solidFill>
                   <a:srgbClr val="94A3B8"/>
                 </a:solidFill>
@@ -3995,15 +3991,11 @@
               </a:defRPr>
             </a:pPr>
             <a:r>
-              <a:t>• tsvector search_vector: A calculated text vector combining titles, decisions, and actions.</a:t>
+              <a:t>• Schedule Modal: Configures meeting details with a security sensitivity level picker (Low to Top Secret).</a:t>
             </a:r>
             <a:br/>
             <a:r>
-              <a:t>• GIN Indexing: Applied on search_vector to enable rapid full-text search matches.</a:t>
-            </a:r>
-            <a:br/>
-            <a:r>
-              <a:t>• Update Trigger: Run on inserts/updates to keep lexeme indices synced.</a:t>
+              <a:t>• Security Badge: Displays active E2EE encryption status in meeting rooms.</a:t>
             </a:r>
           </a:p>
         </p:txBody>
@@ -4101,7 +4093,7 @@
               </a:defRPr>
             </a:pPr>
             <a:r>
-              <a:t>Core REST API Specs &amp; JSON Payloads</a:t>
+              <a:t>Module 2/3: Secure Video Archive Portal</a:t>
             </a:r>
           </a:p>
         </p:txBody>
@@ -4140,7 +4132,7 @@
               </a:defRPr>
             </a:pPr>
             <a:r>
-              <a:t>API Routes Mapping</a:t>
+              <a:t>Interactive Media Player</a:t>
             </a:r>
           </a:p>
           <a:p>
@@ -4148,7 +4140,7 @@
               <a:lnSpc>
                 <a:spcPct val="120000"/>
               </a:lnSpc>
-              <a:defRPr sz="1500">
+              <a:defRPr sz="1400">
                 <a:solidFill>
                   <a:srgbClr val="94A3B8"/>
                 </a:solidFill>
@@ -4156,19 +4148,11 @@
               </a:defRPr>
             </a:pPr>
             <a:r>
-              <a:t>• GET /api/audit-logs: Returns security logs with severity and user filters.</a:t>
+              <a:t>• Custom Controls: Features custom Play, Pause, Time Seek bar, and Volume controls.</a:t>
             </a:r>
             <a:br/>
             <a:r>
-              <a:t>• GET /api/attendance: Returns meeting participant logs and session percentages.</a:t>
-            </a:r>
-            <a:br/>
-            <a:r>
-              <a:t>• POST /api/reports/generate: Compiles logs, outputs PDF/CSV, and seals to ledger.</a:t>
-            </a:r>
-            <a:br/>
-            <a:r>
-              <a:t>• GET /api/memory/search?q=query: Queries FTS registry with active user role validation.</a:t>
+              <a:t>• Object URL Ingestion: Enables dragging and dropping MP4/WebM recordings to play them locally.</a:t>
             </a:r>
           </a:p>
         </p:txBody>
@@ -4207,7 +4191,7 @@
               </a:defRPr>
             </a:pPr>
             <a:r>
-              <a:t>Sample Generated Report Schema</a:t>
+              <a:t>Audit Trails &amp; Watermarks</a:t>
             </a:r>
           </a:p>
           <a:p>
@@ -4215,7 +4199,7 @@
               <a:lnSpc>
                 <a:spcPct val="120000"/>
               </a:lnSpc>
-              <a:defRPr sz="1500">
+              <a:defRPr sz="1400">
                 <a:solidFill>
                   <a:srgbClr val="94A3B8"/>
                 </a:solidFill>
@@ -4223,31 +4207,11 @@
               </a:defRPr>
             </a:pPr>
             <a:r>
-              <a:t>{</a:t>
+              <a:t>• Security Overlay: Watermarks confidentiality text with user credentials and timestamp.</a:t>
             </a:r>
             <a:br/>
             <a:r>
-              <a:t>  "id": "REP-2026-8941",</a:t>
-            </a:r>
-            <a:br/>
-            <a:r>
-              <a:t>  "type": "security",</a:t>
-            </a:r>
-            <a:br/>
-            <a:r>
-              <a:t>  "meetingId": "meet-001",</a:t>
-            </a:r>
-            <a:br/>
-            <a:r>
-              <a:t>  "timestamp": "2026-08-08T09:12:40Z",</a:t>
-            </a:r>
-            <a:br/>
-            <a:r>
-              <a:t>  "hash": "0x8a92fbcd9a928ef782bcf9287cba1192e8bf77a8"</a:t>
-            </a:r>
-            <a:br/>
-            <a:r>
-              <a:t>}</a:t>
+              <a:t>• Integrity Seal: Displays SHA-256 hashes and access clearance role listings.</a:t>
             </a:r>
           </a:p>
         </p:txBody>
@@ -4345,7 +4309,7 @@
               </a:defRPr>
             </a:pPr>
             <a:r>
-              <a:t>Attendance Webhook Mechanics</a:t>
+              <a:t>Module 3: Secure S3 File Management</a:t>
             </a:r>
           </a:p>
         </p:txBody>
@@ -4384,7 +4348,7 @@
               </a:defRPr>
             </a:pPr>
             <a:r>
-              <a:t>Connection Tracking &amp; Durations</a:t>
+              <a:t>Secure Upload System</a:t>
             </a:r>
           </a:p>
           <a:p>
@@ -4392,7 +4356,7 @@
               <a:lnSpc>
                 <a:spcPct val="120000"/>
               </a:lnSpc>
-              <a:defRPr sz="1500">
+              <a:defRPr sz="1400">
                 <a:solidFill>
                   <a:srgbClr val="94A3B8"/>
                 </a:solidFill>
@@ -4400,7 +4364,11 @@
               </a:defRPr>
             </a:pPr>
             <a:r>
-              <a:t>Ingests Jitsi webhook triggers and updates the participant session log. Calculates duration: Duration = Leave Time - Join Time (expressed in minutes).</a:t>
+              <a:t>• Drag &amp; Drop Zone: Drag PDF reports or Excel sheets to trigger upload sequence animations.</a:t>
+            </a:r>
+            <a:br/>
+            <a:r>
+              <a:t>• File Validation: Check size restrictions (max 20MB) and formats before hashing.</a:t>
             </a:r>
           </a:p>
         </p:txBody>
@@ -4439,7 +4407,7 @@
               </a:defRPr>
             </a:pPr>
             <a:r>
-              <a:t>Smart Status Badging Matrix</a:t>
+              <a:t>Storage Audits &amp; Metadata</a:t>
             </a:r>
           </a:p>
           <a:p>
@@ -4447,7 +4415,7 @@
               <a:lnSpc>
                 <a:spcPct val="120000"/>
               </a:lnSpc>
-              <a:defRPr sz="1500">
+              <a:defRPr sz="1400">
                 <a:solidFill>
                   <a:srgbClr val="94A3B8"/>
                 </a:solidFill>
@@ -4455,19 +4423,11 @@
               </a:defRPr>
             </a:pPr>
             <a:r>
-              <a:t>• Present: Logged in on-time and completed session.</a:t>
+              <a:t>• S3 Indicators: Displays live MinIO/S3 cluster status.</a:t>
             </a:r>
             <a:br/>
             <a:r>
-              <a:t>• Late: Logged in &gt; 5 minutes past scheduled start time.</a:t>
-            </a:r>
-            <a:br/>
-            <a:r>
-              <a:t>• Left Early: Disconnected before the meeting was formally adjourned.</a:t>
-            </a:r>
-            <a:br/>
-            <a:r>
-              <a:t>• Absent: Invitee record present in meeting but no connection logs found.</a:t>
+              <a:t>• File Clearance Inspector: View AES-256 encryption tags, SHA-256 hashes, and version counts.</a:t>
             </a:r>
           </a:p>
         </p:txBody>
@@ -4565,7 +4525,7 @@
               </a:defRPr>
             </a:pPr>
             <a:r>
-              <a:t>Security Audits &amp; SOC Remediations</a:t>
+              <a:t>Module 4: Blockchain Ledger Verification</a:t>
             </a:r>
           </a:p>
         </p:txBody>
@@ -4604,7 +4564,7 @@
               </a:defRPr>
             </a:pPr>
             <a:r>
-              <a:t>Auditing Severity Categorization</a:t>
+              <a:t>Integrity Check Terminal</a:t>
             </a:r>
           </a:p>
           <a:p>
@@ -4612,7 +4572,7 @@
               <a:lnSpc>
                 <a:spcPct val="120000"/>
               </a:lnSpc>
-              <a:defRPr sz="1500">
+              <a:defRPr sz="1400">
                 <a:solidFill>
                   <a:srgbClr val="94A3B8"/>
                 </a:solidFill>
@@ -4620,15 +4580,11 @@
               </a:defRPr>
             </a:pPr>
             <a:r>
-              <a:t>• INFO: Normal operations (e.g. login success, file queries).</a:t>
+              <a:t>• SHA-256 Verifier: Paste file hashes to query the blockchain registry.</a:t>
             </a:r>
             <a:br/>
             <a:r>
-              <a:t>• WARNING: Early triggers (e.g. leaving early, minor permission updates).</a:t>
-            </a:r>
-            <a:br/>
-            <a:r>
-              <a:t>• CRITICAL: Severe alerts (e.g. failed login limits, direct data download queries).</a:t>
+              <a:t>• Integrity Statuses: Green verified organizational badge or Red compromised warning panels.</a:t>
             </a:r>
           </a:p>
         </p:txBody>
@@ -4667,7 +4623,7 @@
               </a:defRPr>
             </a:pPr>
             <a:r>
-              <a:t>SOC Automated Mitigation Protocols</a:t>
+              <a:t>Fabric Block Explorer</a:t>
             </a:r>
           </a:p>
           <a:p>
@@ -4675,7 +4631,7 @@
               <a:lnSpc>
                 <a:spcPct val="120000"/>
               </a:lnSpc>
-              <a:defRPr sz="1500">
+              <a:defRPr sz="1400">
                 <a:solidFill>
                   <a:srgbClr val="94A3B8"/>
                 </a:solidFill>
@@ -4683,11 +4639,11 @@
               </a:defRPr>
             </a:pPr>
             <a:r>
-              <a:t>• IP Quarantine: Blocks client IPs if 5 failed login attempts occur in 2 minutes.</a:t>
+              <a:t>• Visual Timelines: Displays newly committed ledger blocks.</a:t>
             </a:r>
             <a:br/>
             <a:r>
-              <a:t>• Verification Modal: Compliance officers inspect logs and resolve alerts directly from UI.</a:t>
+              <a:t>• Metadata: Tracks transaction IDs, channels, block heights, and anchoring stamps.</a:t>
             </a:r>
           </a:p>
         </p:txBody>
@@ -4785,7 +4741,7 @@
               </a:defRPr>
             </a:pPr>
             <a:r>
-              <a:t>Reports Engine &amp; Blockchain Sealing</a:t>
+              <a:t>Module 5: AI Meeting Intelligence Engine</a:t>
             </a:r>
           </a:p>
         </p:txBody>
@@ -4824,7 +4780,7 @@
               </a:defRPr>
             </a:pPr>
             <a:r>
-              <a:t>Compliance PDF Builder</a:t>
+              <a:t>AI Transcripts &amp; Summarization</a:t>
             </a:r>
           </a:p>
           <a:p>
@@ -4832,7 +4788,7 @@
               <a:lnSpc>
                 <a:spcPct val="120000"/>
               </a:lnSpc>
-              <a:defRPr sz="1500">
+              <a:defRPr sz="1400">
                 <a:solidFill>
                   <a:srgbClr val="94A3B8"/>
                 </a:solidFill>
@@ -4840,7 +4796,11 @@
               </a:defRPr>
             </a:pPr>
             <a:r>
-              <a:t>Retrieves logs for chosen meetings and date boundaries. Renders a simulated compliance PDF directly inside the browser, containing official headers, summary blocks, and verify signatures.</a:t>
+              <a:t>• Speaker Tagged Feed: Automatically splits spoken dialogue with exact timestamps.</a:t>
+            </a:r>
+            <a:br/>
+            <a:r>
+              <a:t>• MoM Minutes: Compiles goals summaries, approvals, and decisions list.</a:t>
             </a:r>
           </a:p>
         </p:txBody>
@@ -4879,7 +4839,7 @@
               </a:defRPr>
             </a:pPr>
             <a:r>
-              <a:t>Blockchain Integrity Lock (M4 Integration)</a:t>
+              <a:t>Human Sign-off Workflow</a:t>
             </a:r>
           </a:p>
           <a:p>
@@ -4887,7 +4847,7 @@
               <a:lnSpc>
                 <a:spcPct val="120000"/>
               </a:lnSpc>
-              <a:defRPr sz="1500">
+              <a:defRPr sz="1400">
                 <a:solidFill>
                   <a:srgbClr val="94A3B8"/>
                 </a:solidFill>
@@ -4895,7 +4855,11 @@
               </a:defRPr>
             </a:pPr>
             <a:r>
-              <a:t>M6 hashes the report file payload using SHA-256. This hash is committed to the blockchain, creating a read-only token seal. Anyone altering the database later fails verification checks.</a:t>
+              <a:t>• Review Portal: Action items list tracks assignees, deadlines, and progress states.</a:t>
+            </a:r>
+            <a:br/>
+            <a:r>
+              <a:t>• Sign-off Steps: Transitions records through three states (AI-Generated ➔ Human Approved ➔ Final Commit).</a:t>
             </a:r>
           </a:p>
         </p:txBody>
@@ -4993,7 +4957,7 @@
               </a:defRPr>
             </a:pPr>
             <a:r>
-              <a:t>Authorized Institutional Memory Search</a:t>
+              <a:t>Module 6: Compliance Auditing &amp; Attendance</a:t>
             </a:r>
           </a:p>
         </p:txBody>
@@ -5032,7 +4996,7 @@
               </a:defRPr>
             </a:pPr>
             <a:r>
-              <a:t>FTS &amp; Relevance Rank Scoring</a:t>
+              <a:t>Attendance Duration Logs</a:t>
             </a:r>
           </a:p>
           <a:p>
@@ -5040,7 +5004,7 @@
               <a:lnSpc>
                 <a:spcPct val="120000"/>
               </a:lnSpc>
-              <a:defRPr sz="1500">
+              <a:defRPr sz="1400">
                 <a:solidFill>
                   <a:srgbClr val="94A3B8"/>
                 </a:solidFill>
@@ -5048,7 +5012,11 @@
               </a:defRPr>
             </a:pPr>
             <a:r>
-              <a:t>Enables users to search historical logs (e.g. 'budget decision'). Sorts results by relevance percentage match scores, displaying decision descriptions and attachments.</a:t>
+              <a:t>• Jitsi Webhooks: Captures user connect/disconnect timestamps.</a:t>
+            </a:r>
+            <a:br/>
+            <a:r>
+              <a:t>• Duration Formula: Computes total minutes, flagging Late and Left Early parameters.</a:t>
             </a:r>
           </a:p>
         </p:txBody>
@@ -5087,7 +5055,7 @@
               </a:defRPr>
             </a:pPr>
             <a:r>
-              <a:t>Role-Based Access Control Filters</a:t>
+              <a:t>System Activity Auditing</a:t>
             </a:r>
           </a:p>
           <a:p>
@@ -5095,7 +5063,7 @@
               <a:lnSpc>
                 <a:spcPct val="120000"/>
               </a:lnSpc>
-              <a:defRPr sz="1500">
+              <a:defRPr sz="1400">
                 <a:solidFill>
                   <a:srgbClr val="94A3B8"/>
                 </a:solidFill>
@@ -5103,7 +5071,11 @@
               </a:defRPr>
             </a:pPr>
             <a:r>
-              <a:t>The search query automatically enforces: AND :user_role = ANY(authorized_roles). If the session user's role is not verified for the document, the record is dropped from results.</a:t>
+              <a:t>• M6 Ledger: Logs user actions, modules, origins, IP, and severities.</a:t>
+            </a:r>
+            <a:br/>
+            <a:r>
+              <a:t>• SOC Alarms: Quarantines threat origins and prompts mitigation actions.</a:t>
             </a:r>
           </a:p>
         </p:txBody>
